--- a/Power BI Report/Highlands Report.pptx
+++ b/Power BI Report/Highlands Report.pptx
@@ -10253,7 +10253,7 @@
           <a:p>
             <a:fld id="{24408E2B-7394-44D1-8F58-87C83FDD5359}" type="datetimeFigureOut">
               <a:rPr lang="en-US" smtClean="0"/>
-              <a:t>12/4/2025</a:t>
+              <a:t>12/6/2025</a:t>
             </a:fld>
             <a:endParaRPr lang="en-US"/>
           </a:p>
@@ -12347,270 +12347,6 @@
       </p:sp>
       <p:sp>
         <p:nvSpPr>
-          <p:cNvPr id="5" name="Content Placeholder 4">
-            <a:extLst>
-              <a:ext uri="{FF2B5EF4-FFF2-40B4-BE49-F238E27FC236}">
-                <a16:creationId xmlns:a16="http://schemas.microsoft.com/office/drawing/2014/main" id="{110844F8-986E-9168-0126-EF0F7944CA85}"/>
-              </a:ext>
-            </a:extLst>
-          </p:cNvPr>
-          <p:cNvSpPr>
-            <a:spLocks noGrp="1"/>
-          </p:cNvSpPr>
-          <p:nvPr>
-            <p:ph idx="4294967295"/>
-          </p:nvPr>
-        </p:nvSpPr>
-        <p:spPr>
-          <a:xfrm>
-            <a:off x="838200" y="1317813"/>
-            <a:ext cx="10515600" cy="383987"/>
-          </a:xfrm>
-        </p:spPr>
-        <p:txBody>
-          <a:bodyPr/>
-          <a:lstStyle/>
-          <a:p>
-            <a:pPr>
-              <a:buNone/>
-            </a:pPr>
-            <a:r>
-              <a:rPr lang="en-US" dirty="0"/>
-              <a:t>Market Context</a:t>
-            </a:r>
-          </a:p>
-        </p:txBody>
-      </p:sp>
-      <p:sp>
-        <p:nvSpPr>
-          <p:cNvPr id="6" name="Content Placeholder 4">
-            <a:extLst>
-              <a:ext uri="{FF2B5EF4-FFF2-40B4-BE49-F238E27FC236}">
-                <a16:creationId xmlns:a16="http://schemas.microsoft.com/office/drawing/2014/main" id="{5B1AEF5F-31C0-925A-A28E-12BE2BC1211B}"/>
-              </a:ext>
-            </a:extLst>
-          </p:cNvPr>
-          <p:cNvSpPr txBox="1">
-            <a:spLocks/>
-          </p:cNvSpPr>
-          <p:nvPr/>
-        </p:nvSpPr>
-        <p:spPr>
-          <a:xfrm>
-            <a:off x="838200" y="1701800"/>
-            <a:ext cx="10515600" cy="383987"/>
-          </a:xfrm>
-          <a:prstGeom prst="rect">
-            <a:avLst/>
-          </a:prstGeom>
-        </p:spPr>
-        <p:txBody>
-          <a:bodyPr vert="horz" lIns="91440" tIns="45720" rIns="91440" bIns="45720" rtlCol="0">
-            <a:normAutofit/>
-          </a:bodyPr>
-          <a:lstStyle>
-            <a:lvl1pPr marL="0" indent="0" algn="l" defTabSz="914400" rtl="0" eaLnBrk="1" latinLnBrk="0" hangingPunct="1">
-              <a:lnSpc>
-                <a:spcPct val="90000"/>
-              </a:lnSpc>
-              <a:spcBef>
-                <a:spcPts val="1000"/>
-              </a:spcBef>
-              <a:buClr>
-                <a:schemeClr val="bg1"/>
-              </a:buClr>
-              <a:buSzPct val="100000"/>
-              <a:buFontTx/>
-              <a:buChar char="‬"/>
-              <a:defRPr sz="2000" kern="1200">
-                <a:solidFill>
-                  <a:srgbClr val="C00000"/>
-                </a:solidFill>
-                <a:latin typeface="+mn-lt"/>
-                <a:ea typeface="+mn-ea"/>
-                <a:cs typeface="+mn-cs"/>
-              </a:defRPr>
-            </a:lvl1pPr>
-            <a:lvl2pPr marL="119063" indent="-119063" algn="l" defTabSz="914400" rtl="0" eaLnBrk="1" latinLnBrk="0" hangingPunct="1">
-              <a:lnSpc>
-                <a:spcPct val="90000"/>
-              </a:lnSpc>
-              <a:spcBef>
-                <a:spcPts val="500"/>
-              </a:spcBef>
-              <a:buClr>
-                <a:schemeClr val="bg1"/>
-              </a:buClr>
-              <a:buSzPct val="100000"/>
-              <a:buFontTx/>
-              <a:buChar char="‬"/>
-              <a:defRPr sz="1600" kern="1200">
-                <a:solidFill>
-                  <a:schemeClr val="tx1"/>
-                </a:solidFill>
-                <a:latin typeface="Segoe UI Variable Display" pitchFamily="2" charset="0"/>
-                <a:ea typeface="+mn-ea"/>
-                <a:cs typeface="+mn-cs"/>
-              </a:defRPr>
-            </a:lvl2pPr>
-            <a:lvl3pPr marL="0" indent="0" algn="l" defTabSz="914400" rtl="0" eaLnBrk="1" latinLnBrk="0" hangingPunct="1">
-              <a:lnSpc>
-                <a:spcPct val="90000"/>
-              </a:lnSpc>
-              <a:spcBef>
-                <a:spcPts val="500"/>
-              </a:spcBef>
-              <a:buClr>
-                <a:schemeClr val="bg1"/>
-              </a:buClr>
-              <a:buSzPct val="100000"/>
-              <a:buFontTx/>
-              <a:buChar char="‬"/>
-              <a:defRPr sz="1400" kern="1200">
-                <a:solidFill>
-                  <a:schemeClr val="tx1"/>
-                </a:solidFill>
-                <a:latin typeface="Segoe UI Variable Display" pitchFamily="2" charset="0"/>
-                <a:ea typeface="+mn-ea"/>
-                <a:cs typeface="+mn-cs"/>
-              </a:defRPr>
-            </a:lvl3pPr>
-            <a:lvl4pPr marL="169862" indent="0" algn="l" defTabSz="914400" rtl="0" eaLnBrk="1" latinLnBrk="0" hangingPunct="1">
-              <a:lnSpc>
-                <a:spcPct val="90000"/>
-              </a:lnSpc>
-              <a:spcBef>
-                <a:spcPts val="500"/>
-              </a:spcBef>
-              <a:buClr>
-                <a:schemeClr val="bg1"/>
-              </a:buClr>
-              <a:buSzPct val="100000"/>
-              <a:buFontTx/>
-              <a:buChar char="‬"/>
-              <a:defRPr sz="1200" kern="1200">
-                <a:solidFill>
-                  <a:schemeClr val="tx1"/>
-                </a:solidFill>
-                <a:latin typeface="Segoe UI Variable Display" pitchFamily="2" charset="0"/>
-                <a:ea typeface="+mn-ea"/>
-                <a:cs typeface="+mn-cs"/>
-              </a:defRPr>
-            </a:lvl4pPr>
-            <a:lvl5pPr marL="169863" indent="0" algn="l" defTabSz="914400" rtl="0" eaLnBrk="1" latinLnBrk="0" hangingPunct="1">
-              <a:lnSpc>
-                <a:spcPct val="90000"/>
-              </a:lnSpc>
-              <a:spcBef>
-                <a:spcPts val="500"/>
-              </a:spcBef>
-              <a:buClr>
-                <a:schemeClr val="bg1"/>
-              </a:buClr>
-              <a:buSzPct val="100000"/>
-              <a:buFontTx/>
-              <a:buChar char="‬"/>
-              <a:defRPr sz="1100" kern="1200">
-                <a:solidFill>
-                  <a:schemeClr val="tx1"/>
-                </a:solidFill>
-                <a:latin typeface="Segoe UI Variable Display" pitchFamily="2" charset="0"/>
-                <a:ea typeface="+mn-ea"/>
-                <a:cs typeface="+mn-cs"/>
-              </a:defRPr>
-            </a:lvl5pPr>
-            <a:lvl6pPr marL="2514600" indent="-228600" algn="l" defTabSz="914400" rtl="0" eaLnBrk="1" latinLnBrk="0" hangingPunct="1">
-              <a:lnSpc>
-                <a:spcPct val="90000"/>
-              </a:lnSpc>
-              <a:spcBef>
-                <a:spcPts val="500"/>
-              </a:spcBef>
-              <a:buFont typeface="Arial" panose="020B0604020202020204" pitchFamily="34" charset="0"/>
-              <a:buChar char="•"/>
-              <a:defRPr sz="1800" kern="1200">
-                <a:solidFill>
-                  <a:schemeClr val="tx1"/>
-                </a:solidFill>
-                <a:latin typeface="+mn-lt"/>
-                <a:ea typeface="+mn-ea"/>
-                <a:cs typeface="+mn-cs"/>
-              </a:defRPr>
-            </a:lvl6pPr>
-            <a:lvl7pPr marL="2971800" indent="-228600" algn="l" defTabSz="914400" rtl="0" eaLnBrk="1" latinLnBrk="0" hangingPunct="1">
-              <a:lnSpc>
-                <a:spcPct val="90000"/>
-              </a:lnSpc>
-              <a:spcBef>
-                <a:spcPts val="500"/>
-              </a:spcBef>
-              <a:buFont typeface="Arial" panose="020B0604020202020204" pitchFamily="34" charset="0"/>
-              <a:buChar char="•"/>
-              <a:defRPr sz="1800" kern="1200">
-                <a:solidFill>
-                  <a:schemeClr val="tx1"/>
-                </a:solidFill>
-                <a:latin typeface="+mn-lt"/>
-                <a:ea typeface="+mn-ea"/>
-                <a:cs typeface="+mn-cs"/>
-              </a:defRPr>
-            </a:lvl7pPr>
-            <a:lvl8pPr marL="3429000" indent="-228600" algn="l" defTabSz="914400" rtl="0" eaLnBrk="1" latinLnBrk="0" hangingPunct="1">
-              <a:lnSpc>
-                <a:spcPct val="90000"/>
-              </a:lnSpc>
-              <a:spcBef>
-                <a:spcPts val="500"/>
-              </a:spcBef>
-              <a:buFont typeface="Arial" panose="020B0604020202020204" pitchFamily="34" charset="0"/>
-              <a:buChar char="•"/>
-              <a:defRPr sz="1800" kern="1200">
-                <a:solidFill>
-                  <a:schemeClr val="tx1"/>
-                </a:solidFill>
-                <a:latin typeface="+mn-lt"/>
-                <a:ea typeface="+mn-ea"/>
-                <a:cs typeface="+mn-cs"/>
-              </a:defRPr>
-            </a:lvl8pPr>
-            <a:lvl9pPr marL="3886200" indent="-228600" algn="l" defTabSz="914400" rtl="0" eaLnBrk="1" latinLnBrk="0" hangingPunct="1">
-              <a:lnSpc>
-                <a:spcPct val="90000"/>
-              </a:lnSpc>
-              <a:spcBef>
-                <a:spcPts val="500"/>
-              </a:spcBef>
-              <a:buFont typeface="Arial" panose="020B0604020202020204" pitchFamily="34" charset="0"/>
-              <a:buChar char="•"/>
-              <a:defRPr sz="1800" kern="1200">
-                <a:solidFill>
-                  <a:schemeClr val="tx1"/>
-                </a:solidFill>
-                <a:latin typeface="+mn-lt"/>
-                <a:ea typeface="+mn-ea"/>
-                <a:cs typeface="+mn-cs"/>
-              </a:defRPr>
-            </a:lvl9pPr>
-          </a:lstStyle>
-          <a:p>
-            <a:pPr>
-              <a:buFontTx/>
-              <a:buNone/>
-            </a:pPr>
-            <a:r>
-              <a:rPr lang="en-US" sz="1400" dirty="0">
-                <a:solidFill>
-                  <a:schemeClr val="tx1"/>
-                </a:solidFill>
-                <a:latin typeface="Segoe UI Variable Display" pitchFamily="2" charset="0"/>
-              </a:rPr>
-              <a:t>Driven by a growing economy and increasing disposable income of youthful customer,</a:t>
-            </a:r>
-          </a:p>
-        </p:txBody>
-      </p:sp>
-      <p:sp>
-        <p:nvSpPr>
           <p:cNvPr id="2" name="Slide Number Placeholder 1">
             <a:extLst>
               <a:ext uri="{FF2B5EF4-FFF2-40B4-BE49-F238E27FC236}">
@@ -12634,6 +12370,279 @@
               <a:rPr lang="en-US" smtClean="0"/>
               <a:t>1</a:t>
             </a:fld>
+            <a:endParaRPr lang="en-US"/>
+          </a:p>
+        </p:txBody>
+      </p:sp>
+      <p:sp>
+        <p:nvSpPr>
+          <p:cNvPr id="3" name="Content Placeholder 2">
+            <a:extLst>
+              <a:ext uri="{FF2B5EF4-FFF2-40B4-BE49-F238E27FC236}">
+                <a16:creationId xmlns:a16="http://schemas.microsoft.com/office/drawing/2014/main" id="{5C1ADC19-8B94-5218-42DF-A1E3A6CCA958}"/>
+              </a:ext>
+            </a:extLst>
+          </p:cNvPr>
+          <p:cNvSpPr>
+            <a:spLocks noGrp="1"/>
+          </p:cNvSpPr>
+          <p:nvPr>
+            <p:ph sz="half" idx="13"/>
+          </p:nvPr>
+        </p:nvSpPr>
+        <p:spPr>
+          <a:xfrm>
+            <a:off x="838200" y="1330644"/>
+            <a:ext cx="5002731" cy="4846319"/>
+          </a:xfrm>
+        </p:spPr>
+        <p:txBody>
+          <a:bodyPr/>
+          <a:lstStyle/>
+          <a:p>
+            <a:r>
+              <a:rPr lang="en-US" dirty="0"/>
+              <a:t>Industry Context </a:t>
+            </a:r>
+          </a:p>
+          <a:p>
+            <a:pPr marL="285750" indent="-285750">
+              <a:buClr>
+                <a:schemeClr val="tx1"/>
+              </a:buClr>
+              <a:buSzPct val="100000"/>
+              <a:buFont typeface="Arial" panose="020B0604020202020204" pitchFamily="34" charset="0"/>
+              <a:buChar char="•"/>
+            </a:pPr>
+            <a:r>
+              <a:rPr lang="en-US" dirty="0"/>
+              <a:t> About the industry  (growth, forecast, potential,…)</a:t>
+            </a:r>
+          </a:p>
+          <a:p>
+            <a:pPr marL="285750" indent="-285750">
+              <a:buClr>
+                <a:schemeClr val="tx1"/>
+              </a:buClr>
+              <a:buSzPct val="100000"/>
+              <a:buFont typeface="Arial" panose="020B0604020202020204" pitchFamily="34" charset="0"/>
+              <a:buChar char="•"/>
+            </a:pPr>
+            <a:r>
+              <a:rPr lang="en-US" dirty="0"/>
+              <a:t>Focus on major competitor (store growth, market share, brand value proposition</a:t>
+            </a:r>
+          </a:p>
+          <a:p>
+            <a:r>
+              <a:rPr lang="en-US" dirty="0"/>
+              <a:t>Survey Context</a:t>
+            </a:r>
+          </a:p>
+          <a:p>
+            <a:pPr marL="285750" indent="-285750">
+              <a:buClrTx/>
+              <a:buSzPct val="100000"/>
+              <a:buFont typeface="Arial" panose="020B0604020202020204" pitchFamily="34" charset="0"/>
+              <a:buChar char="•"/>
+            </a:pPr>
+            <a:r>
+              <a:rPr lang="en-US" dirty="0"/>
+              <a:t>Composition of respondents</a:t>
+            </a:r>
+          </a:p>
+          <a:p>
+            <a:pPr marL="285750" indent="-285750">
+              <a:buClrTx/>
+              <a:buSzPct val="100000"/>
+              <a:buFont typeface="Arial" panose="020B0604020202020204" pitchFamily="34" charset="0"/>
+              <a:buChar char="•"/>
+            </a:pPr>
+            <a:r>
+              <a:rPr lang="en-US" dirty="0"/>
+              <a:t>Consider segment the respondent based on major factors. Describe the persona of each segment. </a:t>
+            </a:r>
+          </a:p>
+          <a:p>
+            <a:pPr marL="285750" indent="-285750">
+              <a:buClrTx/>
+              <a:buSzPct val="100000"/>
+              <a:buFont typeface="Arial" panose="020B0604020202020204" pitchFamily="34" charset="0"/>
+              <a:buChar char="•"/>
+            </a:pPr>
+            <a:r>
+              <a:rPr lang="en-US" dirty="0"/>
+              <a:t>Divide the analysis into 2 parallel directions:</a:t>
+            </a:r>
+          </a:p>
+          <a:p>
+            <a:pPr marL="455612" lvl="3" indent="-285750">
+              <a:buClrTx/>
+              <a:buSzPct val="100000"/>
+              <a:buFont typeface="Arial" panose="020B0604020202020204" pitchFamily="34" charset="0"/>
+              <a:buChar char="•"/>
+            </a:pPr>
+            <a:r>
+              <a:rPr lang="en-US" dirty="0"/>
+              <a:t>Analyze difference between city</a:t>
+            </a:r>
+          </a:p>
+          <a:p>
+            <a:pPr marL="455612" lvl="3" indent="-285750">
+              <a:buClrTx/>
+              <a:buSzPct val="100000"/>
+              <a:buFont typeface="Arial" panose="020B0604020202020204" pitchFamily="34" charset="0"/>
+              <a:buChar char="•"/>
+            </a:pPr>
+            <a:r>
+              <a:rPr lang="en-US" dirty="0"/>
+              <a:t>Analyze difference between segment</a:t>
+            </a:r>
+          </a:p>
+          <a:p>
+            <a:pPr marL="285750" indent="-285750">
+              <a:buClrTx/>
+              <a:buSzPct val="100000"/>
+              <a:buFont typeface="Arial" panose="020B0604020202020204" pitchFamily="34" charset="0"/>
+              <a:buChar char="•"/>
+            </a:pPr>
+            <a:r>
+              <a:rPr lang="en-US" dirty="0"/>
+              <a:t>Purchasing frequency and average spending (</a:t>
+            </a:r>
+            <a:r>
+              <a:rPr lang="en-US" dirty="0" err="1"/>
+              <a:t>ppa</a:t>
+            </a:r>
+            <a:r>
+              <a:rPr lang="en-US" dirty="0"/>
+              <a:t>)</a:t>
+            </a:r>
+          </a:p>
+          <a:p>
+            <a:pPr marL="285750" indent="-285750">
+              <a:buClrTx/>
+              <a:buSzPct val="100000"/>
+              <a:buFont typeface="Arial" panose="020B0604020202020204" pitchFamily="34" charset="0"/>
+              <a:buChar char="•"/>
+            </a:pPr>
+            <a:r>
+              <a:rPr lang="en-US" dirty="0"/>
+              <a:t>Peak hours and peak days of week, average spending and visit and need state on these day time</a:t>
+            </a:r>
+          </a:p>
+          <a:p>
+            <a:pPr marL="285750" indent="-285750">
+              <a:buClrTx/>
+              <a:buSzPct val="100000"/>
+              <a:buFont typeface="Arial" panose="020B0604020202020204" pitchFamily="34" charset="0"/>
+              <a:buChar char="•"/>
+            </a:pPr>
+            <a:r>
+              <a:rPr lang="en-US" dirty="0"/>
+              <a:t>Perception of each city, age, occupation about brand attribute</a:t>
+            </a:r>
+          </a:p>
+          <a:p>
+            <a:pPr marL="455612" lvl="3" indent="-285750">
+              <a:buClrTx/>
+              <a:buSzPct val="100000"/>
+              <a:buFont typeface="Arial" panose="020B0604020202020204" pitchFamily="34" charset="0"/>
+              <a:buChar char="•"/>
+            </a:pPr>
+            <a:r>
+              <a:rPr lang="en-US" dirty="0"/>
+              <a:t>Show bar chart by attribute group</a:t>
+            </a:r>
+          </a:p>
+          <a:p>
+            <a:pPr marL="455612" lvl="3" indent="-285750">
+              <a:buClrTx/>
+              <a:buSzPct val="100000"/>
+              <a:buFont typeface="Arial" panose="020B0604020202020204" pitchFamily="34" charset="0"/>
+              <a:buChar char="•"/>
+            </a:pPr>
+            <a:r>
+              <a:rPr lang="en-US" dirty="0"/>
+              <a:t>Bar chart for average ranking of each attribute group to reflect the different in perception of each group</a:t>
+            </a:r>
+          </a:p>
+          <a:p>
+            <a:pPr marL="455612" lvl="3" indent="-285750">
+              <a:buClrTx/>
+              <a:buSzPct val="100000"/>
+              <a:buFont typeface="Arial" panose="020B0604020202020204" pitchFamily="34" charset="0"/>
+              <a:buChar char="•"/>
+            </a:pPr>
+            <a:endParaRPr lang="en-US" dirty="0"/>
+          </a:p>
+          <a:p>
+            <a:pPr marL="285750" indent="-285750">
+              <a:buClrTx/>
+              <a:buSzPct val="100000"/>
+              <a:buFont typeface="Arial" panose="020B0604020202020204" pitchFamily="34" charset="0"/>
+              <a:buChar char="•"/>
+            </a:pPr>
+            <a:endParaRPr lang="en-US" dirty="0"/>
+          </a:p>
+          <a:p>
+            <a:endParaRPr lang="en-US" dirty="0"/>
+          </a:p>
+        </p:txBody>
+      </p:sp>
+      <p:pic>
+        <p:nvPicPr>
+          <p:cNvPr id="10" name="Content Placeholder 9">
+            <a:extLst>
+              <a:ext uri="{FF2B5EF4-FFF2-40B4-BE49-F238E27FC236}">
+                <a16:creationId xmlns:a16="http://schemas.microsoft.com/office/drawing/2014/main" id="{2E8E69FB-204D-B1BB-F4B5-93CFCAD877A1}"/>
+              </a:ext>
+            </a:extLst>
+          </p:cNvPr>
+          <p:cNvPicPr>
+            <a:picLocks noGrp="1" noChangeAspect="1"/>
+          </p:cNvPicPr>
+          <p:nvPr>
+            <p:ph sz="half" idx="14"/>
+          </p:nvPr>
+        </p:nvPicPr>
+        <p:blipFill>
+          <a:blip r:embed="rId2"/>
+          <a:stretch>
+            <a:fillRect/>
+          </a:stretch>
+        </p:blipFill>
+        <p:spPr>
+          <a:xfrm>
+            <a:off x="6305549" y="1784990"/>
+            <a:ext cx="5362575" cy="2060099"/>
+          </a:xfrm>
+          <a:prstGeom prst="rect">
+            <a:avLst/>
+          </a:prstGeom>
+        </p:spPr>
+      </p:pic>
+      <p:sp>
+        <p:nvSpPr>
+          <p:cNvPr id="8" name="Content Placeholder 7">
+            <a:extLst>
+              <a:ext uri="{FF2B5EF4-FFF2-40B4-BE49-F238E27FC236}">
+                <a16:creationId xmlns:a16="http://schemas.microsoft.com/office/drawing/2014/main" id="{57848EDB-C09D-9DCF-170C-E1DA640A2F86}"/>
+              </a:ext>
+            </a:extLst>
+          </p:cNvPr>
+          <p:cNvSpPr>
+            <a:spLocks noGrp="1"/>
+          </p:cNvSpPr>
+          <p:nvPr>
+            <p:ph sz="half" idx="15"/>
+          </p:nvPr>
+        </p:nvSpPr>
+        <p:spPr/>
+        <p:txBody>
+          <a:bodyPr/>
+          <a:lstStyle/>
+          <a:p>
             <a:endParaRPr lang="en-US"/>
           </a:p>
         </p:txBody>
